--- a/reports/2026-05-mid-demo/01-簡報-ForestMRV系統介紹.pptx
+++ b/reports/2026-05-mid-demo/01-簡報-ForestMRV系統介紹.pptx
@@ -18887,7 +18887,7 @@
                 <a:ea typeface="Microsoft JhengHei" pitchFamily="34" charset="-122"/>
                 <a:cs typeface="Microsoft JhengHei" pitchFamily="34" charset="-120"/>
               </a:rPr>
-              <a:t>[Screenshot：登入頁 + 專案卡片]</a:t>
+              <a:t>[Screenshot P03：登入頁 + 專案卡片]</a:t>
             </a:r>
             <a:endParaRPr lang="en-US" sz="1200" dirty="0"/>
           </a:p>
@@ -19476,7 +19476,7 @@
                 <a:ea typeface="Microsoft JhengHei" pitchFamily="34" charset="-122"/>
                 <a:cs typeface="Microsoft JhengHei" pitchFamily="34" charset="-120"/>
               </a:rPr>
-              <a:t>[Screenshot：新專案 form + 成員列表]</a:t>
+              <a:t>[Screenshot P04：新專案 form + 成員列表]</a:t>
             </a:r>
             <a:endParaRPr lang="en-US" sz="1200" dirty="0"/>
           </a:p>
@@ -20895,7 +20895,7 @@
                 <a:ea typeface="Microsoft JhengHei" pitchFamily="34" charset="-122"/>
                 <a:cs typeface="Microsoft JhengHei" pitchFamily="34" charset="-120"/>
               </a:rPr>
-              <a:t>[Screenshot：樣區 form（v2.10.9）]</a:t>
+              <a:t>[Screenshot P05：樣區 form（v2.10.9）]</a:t>
             </a:r>
             <a:endParaRPr lang="en-US" sz="1200" dirty="0"/>
           </a:p>
@@ -21484,7 +21484,7 @@
                 <a:ea typeface="Microsoft JhengHei" pitchFamily="34" charset="-122"/>
                 <a:cs typeface="Microsoft JhengHei" pitchFamily="34" charset="-120"/>
               </a:rPr>
-              <a:t>[Screenshot：樹種 picker 下拉（v2.10.5+）]</a:t>
+              <a:t>[Screenshot P06：樹種 picker 下拉（v2.10.5+）]</a:t>
             </a:r>
             <a:endParaRPr lang="en-US" sz="1200" dirty="0"/>
           </a:p>
@@ -22094,7 +22094,7 @@
                 <a:ea typeface="Microsoft JhengHei" pitchFamily="34" charset="-122"/>
                 <a:cs typeface="Microsoft JhengHei" pitchFamily="34" charset="-120"/>
               </a:rPr>
-              <a:t>[Screenshot：立木 form + 試算欄]</a:t>
+              <a:t>[Screenshot P07：立木 form + 試算欄]</a:t>
             </a:r>
             <a:endParaRPr lang="en-US" sz="1200" dirty="0"/>
           </a:p>
@@ -22704,7 +22704,7 @@
                 <a:ea typeface="Microsoft JhengHei" pitchFamily="34" charset="-122"/>
                 <a:cs typeface="Microsoft JhengHei" pitchFamily="34" charset="-120"/>
               </a:rPr>
-              <a:t>[Screenshot：樣區 subtab 切換]</a:t>
+              <a:t>[Screenshot P08：樣區 subtab 切換]</a:t>
             </a:r>
             <a:endParaRPr lang="en-US" sz="1200" dirty="0"/>
           </a:p>
@@ -23293,7 +23293,7 @@
                 <a:ea typeface="Microsoft JhengHei" pitchFamily="34" charset="-122"/>
                 <a:cs typeface="Microsoft JhengHei" pitchFamily="34" charset="-120"/>
               </a:rPr>
-              <a:t>[Screenshot：Dashboard tab（v2.9.0+）]</a:t>
+              <a:t>[Screenshot P09：Dashboard tab（v2.9.0+）]</a:t>
             </a:r>
             <a:endParaRPr lang="en-US" sz="1200" dirty="0"/>
           </a:p>
@@ -23903,7 +23903,7 @@
                 <a:ea typeface="Microsoft JhengHei" pitchFamily="34" charset="-122"/>
                 <a:cs typeface="Microsoft JhengHei" pitchFamily="34" charset="-120"/>
               </a:rPr>
-              <a:t>[Screenshot：Per-plot dashboard（v2.9.0 A）]</a:t>
+              <a:t>[Screenshot P10：Per-plot dashboard（v2.9.0 A）]</a:t>
             </a:r>
             <a:endParaRPr lang="en-US" sz="1200" dirty="0"/>
           </a:p>
@@ -24492,7 +24492,7 @@
                 <a:ea typeface="Microsoft JhengHei" pitchFamily="34" charset="-122"/>
                 <a:cs typeface="Microsoft JhengHei" pitchFamily="34" charset="-120"/>
               </a:rPr>
-              <a:t>[Screenshot：樣區地圖 + 立木分布散布圖]</a:t>
+              <a:t>[Screenshot P11：樣區地圖 + 立木分布散布圖]</a:t>
             </a:r>
             <a:endParaRPr lang="en-US" sz="1200" dirty="0"/>
           </a:p>
@@ -25081,7 +25081,7 @@
                 <a:ea typeface="Microsoft JhengHei" pitchFamily="34" charset="-122"/>
                 <a:cs typeface="Microsoft JhengHei" pitchFamily="34" charset="-120"/>
               </a:rPr>
-              <a:t>[Screenshot：QAQC tab（v2.7.17 + v2.8.1）]</a:t>
+              <a:t>[Screenshot P12：QAQC tab（v2.7.17 + v2.8.1）]</a:t>
             </a:r>
             <a:endParaRPr lang="en-US" sz="1200" dirty="0"/>
           </a:p>
@@ -25691,7 +25691,7 @@
                 <a:ea typeface="Microsoft JhengHei" pitchFamily="34" charset="-122"/>
                 <a:cs typeface="Microsoft JhengHei" pitchFamily="34" charset="-120"/>
               </a:rPr>
-              <a:t>[Screenshot：AI 辨識 demo gif（拍照 → 辨識結果）]</a:t>
+              <a:t>[Screenshot P13：AI 辨識 demo gif（拍照 → 辨識結果）]</a:t>
             </a:r>
             <a:endParaRPr lang="en-US" sz="1200" dirty="0"/>
           </a:p>
@@ -27812,7 +27812,7 @@
                 <a:ea typeface="Microsoft JhengHei" pitchFamily="34" charset="-122"/>
                 <a:cs typeface="Microsoft JhengHei" pitchFamily="34" charset="-120"/>
               </a:rPr>
-              <a:t>[Screenshot：講者照片]</a:t>
+              <a:t>[Screenshot P01：講者照片]</a:t>
             </a:r>
             <a:endParaRPr lang="en-US" sz="1200" dirty="0"/>
           </a:p>
@@ -30235,7 +30235,7 @@
                 <a:ea typeface="Microsoft JhengHei" pitchFamily="34" charset="-122"/>
                 <a:cs typeface="Microsoft JhengHei" pitchFamily="34" charset="-120"/>
               </a:rPr>
-              <a:t>[Screenshot：AI 辨識結果 modal]</a:t>
+              <a:t>[Screenshot P14：AI 辨識結果 modal]</a:t>
             </a:r>
             <a:endParaRPr lang="en-US" sz="1200" dirty="0"/>
           </a:p>
@@ -46577,7 +46577,7 @@
                 <a:ea typeface="Microsoft JhengHei" pitchFamily="34" charset="-122"/>
                 <a:cs typeface="Microsoft JhengHei" pitchFamily="34" charset="-120"/>
               </a:rPr>
-              <a:t>[Screenshot：野外 surveyor 調查照片]</a:t>
+              <a:t>[Screenshot P02：野外 surveyor 調查照片]</a:t>
             </a:r>
             <a:endParaRPr lang="en-US" sz="1200" dirty="0"/>
           </a:p>
